--- a/data/auto_synced/Investor_Pitch_20MT_Uttar_Pradesh.pptx
+++ b/data/auto_synced/Investor_Pitch_20MT_Uttar_Pradesh.pptx
@@ -3137,7 +3137,7 @@
           </a:p>
           <a:p>
             <a:r>
-              <a:t>Investment: Rs 8.00 Crore | IRR: 32.2%</a:t>
+              <a:t>Investment: Rs 8.00 Crore | IRR: 26.1%</a:t>
             </a:r>
           </a:p>
           <a:p>
@@ -3287,12 +3287,12 @@
           </a:p>
           <a:p>
             <a:r>
-              <a:t>• Equity Required: Rs 3.20 Crore</a:t>
-            </a:r>
-          </a:p>
-          <a:p>
-            <a:r>
-              <a:t>• Bank Loan: Rs 4.80 Crore</a:t>
+              <a:t>• Equity Required: Rs 4.00 Crore</a:t>
+            </a:r>
+          </a:p>
+          <a:p>
+            <a:r>
+              <a:t>• Bank Loan: Rs 4.00 Crore</a:t>
             </a:r>
           </a:p>
           <a:p>
@@ -3302,7 +3302,7 @@
           </a:p>
           <a:p>
             <a:r>
-              <a:t>• ROI: 20.7% | IRR: 32.2%</a:t>
+              <a:t>• ROI: 20.6% | IRR: 26.1%</a:t>
             </a:r>
           </a:p>
           <a:p>
@@ -3312,7 +3312,7 @@
           </a:p>
           <a:p>
             <a:r>
-              <a:t>• DSCR: 1.93x</a:t>
+              <a:t>• DSCR: 2.14x</a:t>
             </a:r>
           </a:p>
         </p:txBody>
@@ -3547,27 +3547,27 @@
           </a:p>
           <a:p>
             <a:r>
-              <a:t>Yr1 | Rs 386L | Rs 148L | Rs 9L | 0.89x</a:t>
-            </a:r>
-          </a:p>
-          <a:p>
-            <a:r>
-              <a:t>Yr2 | Rs 531L | Rs 217L | Rs 61L | 1.41x</a:t>
-            </a:r>
-          </a:p>
-          <a:p>
-            <a:r>
-              <a:t>Yr3 | Rs 676L | Rs 286L | Rs 113L | 1.93x</a:t>
-            </a:r>
-          </a:p>
-          <a:p>
-            <a:r>
-              <a:t>Yr4 | Rs 773L | Rs 332L | Rs 148L | 2.27x</a:t>
-            </a:r>
-          </a:p>
-          <a:p>
-            <a:r>
-              <a:t>Yr5 | Rs 821L | Rs 356L | Rs 165L | 2.45x</a:t>
+              <a:t>Yr1 | Rs 386L | Rs 148L | Rs 9L | 0.99x</a:t>
+            </a:r>
+          </a:p>
+          <a:p>
+            <a:r>
+              <a:t>Yr2 | Rs 531L | Rs 217L | Rs 61L | 1.56x</a:t>
+            </a:r>
+          </a:p>
+          <a:p>
+            <a:r>
+              <a:t>Yr3 | Rs 676L | Rs 286L | Rs 113L | 2.14x</a:t>
+            </a:r>
+          </a:p>
+          <a:p>
+            <a:r>
+              <a:t>Yr4 | Rs 773L | Rs 332L | Rs 147L | 2.53x</a:t>
+            </a:r>
+          </a:p>
+          <a:p>
+            <a:r>
+              <a:t>Yr5 | Rs 821L | Rs 356L | Rs 165L | 2.72x</a:t>
             </a:r>
           </a:p>
           <a:p/>
@@ -3643,7 +3643,7 @@
           </a:p>
           <a:p>
             <a:r>
-              <a:t>• Expected equity IRR: 32.2%</a:t>
+              <a:t>• Expected equity IRR: 26.1%</a:t>
             </a:r>
           </a:p>
           <a:p>
